--- a/docs/SLIDES.pptx
+++ b/docs/SLIDES.pptx
@@ -1304,7 +1304,7 @@
           <a:p>
             <a:r>
               <a:rPr lang="en-US" dirty="0"/>
-              <a:t>1:00. Live demo here if time: `uv run main.py`, type "I lost my card, please block it".</a:t>
+              <a:t>1:00. Live demo here if time: `uv run ui.py`, type "I lost my card, please block it", then "yes".</a:t>
             </a:r>
             <a:endParaRPr lang="en-US" dirty="0"/>
           </a:p>
